--- a/Автотесты-и-ИИ-презентация.pptx
+++ b/Автотесты-и-ИИ-презентация.pptx
@@ -3282,7 +3282,7 @@
                 </a:solidFill>
                 <a:latin typeface="Calibri"/>
               </a:rPr>
-              <a:t>Короткий отчёт о том, что за последние пять месяцев построено в тестировании mechta.kz — простыми словами, без технических терминов.</a:t>
+              <a:t>Короткий отчёт о том, что за последние почти полгода построено в тестировании mechta.kz — простыми словами, без технических терминов.</a:t>
             </a:r>
           </a:p>
         </p:txBody>
@@ -3365,7 +3365,7 @@
                 </a:solidFill>
                 <a:latin typeface="Consolas"/>
               </a:rPr>
-              <a:t>38</a:t>
+              <a:t>57</a:t>
             </a:r>
           </a:p>
         </p:txBody>
@@ -3483,7 +3483,7 @@
                 </a:solidFill>
                 <a:latin typeface="Consolas"/>
               </a:rPr>
-              <a:t>17</a:t>
+              <a:t>49</a:t>
             </a:r>
           </a:p>
         </p:txBody>
@@ -4711,7 +4711,7 @@
                 </a:solidFill>
                 <a:latin typeface="Calibri"/>
               </a:rPr>
-              <a:t>Дозакрыть оставшиеся разделы — личный кабинет и уценённые товары уже в работе.</a:t>
+              <a:t>Устранить найденные баги — в приоритете High-severity (например, вход в аккаунт иногда не завершает сессию при выходе) — уже переданы разработчикам в трекер задач.</a:t>
             </a:r>
           </a:p>
         </p:txBody>
@@ -7250,7 +7250,7 @@
                 </a:solidFill>
                 <a:latin typeface="Consolas"/>
               </a:rPr>
-              <a:t>8 файлов</a:t>
+              <a:t>20 файлов</a:t>
             </a:r>
           </a:p>
         </p:txBody>
@@ -7305,7 +7305,7 @@
                 </a:solidFill>
                 <a:latin typeface="Consolas"/>
               </a:rPr>
-              <a:t>в работе</a:t>
+              <a:t>закрыт</a:t>
             </a:r>
           </a:p>
         </p:txBody>
@@ -7445,7 +7445,7 @@
                 </a:solidFill>
                 <a:latin typeface="Consolas"/>
               </a:rPr>
-              <a:t>1 файл + разведка</a:t>
+              <a:t>7 файлов</a:t>
             </a:r>
           </a:p>
         </p:txBody>
@@ -7500,7 +7500,7 @@
                 </a:solidFill>
                 <a:latin typeface="Consolas"/>
               </a:rPr>
-              <a:t>в работе</a:t>
+              <a:t>закрыт</a:t>
             </a:r>
           </a:p>
         </p:txBody>
@@ -7640,7 +7640,7 @@
                 </a:solidFill>
                 <a:latin typeface="Consolas"/>
               </a:rPr>
-              <a:t>6 файлов</a:t>
+              <a:t>3 файла</a:t>
             </a:r>
           </a:p>
         </p:txBody>
@@ -7835,7 +7835,7 @@
                 </a:solidFill>
                 <a:latin typeface="Consolas"/>
               </a:rPr>
-              <a:t>4 файла</a:t>
+              <a:t>5 файлов</a:t>
             </a:r>
           </a:p>
         </p:txBody>
@@ -7964,7 +7964,7 @@
                 </a:solidFill>
                 <a:latin typeface="Calibri"/>
               </a:rPr>
-              <a:t>Итого задокументировано и сверено с сайтом свыше 750 конкретных проверочных сценариев только по трём крупнейшим разделам. Работа ведётся с 26 февраля 2026 — 84 версии тестового набора за неполные шесть месяцев.</a:t>
+              <a:t>Итого задокументировано и сверено с сайтом свыше 750 конкретных проверочных сценариев только по трём крупнейшим разделам. Работа ведётся с 26 февраля 2026 — 90 версий тестового набора за неполные шесть месяцев.</a:t>
             </a:r>
           </a:p>
         </p:txBody>
@@ -11351,7 +11351,7 @@
                 </a:solidFill>
                 <a:latin typeface="Calibri"/>
               </a:rPr>
-              <a:t>Накопленный за пять месяцев опыт — что проверять, какие ошибки Cypress уже известны, что считать багом — оформлен в один документ. ИИ подгружает его автоматически при любой задаче по mechta.kz.</a:t>
+              <a:t>Накопленный за почти полгода опыт — что проверять, какие ошибки Cypress уже известны, что считать багом, как вести баги в Jira от находки до фикса — оформлен в один документ. ИИ подгружает его автоматически при любой задаче по mechta.kz.</a:t>
             </a:r>
           </a:p>
         </p:txBody>
@@ -11467,7 +11467,7 @@
                 </a:solidFill>
                 <a:latin typeface="Consolas"/>
               </a:rPr>
-              <a:t>~340 СТРОК</a:t>
+              <a:t>~500 СТРОК</a:t>
             </a:r>
           </a:p>
         </p:txBody>
@@ -11903,7 +11903,7 @@
                 </a:solidFill>
                 <a:latin typeface="Calibri"/>
               </a:rPr>
-              <a:t>10+ задокументированных технических ловушек — не наступаем дважды</a:t>
+              <a:t>20+ задокументированных технических ловушек — не наступаем дважды</a:t>
             </a:r>
           </a:p>
         </p:txBody>

--- a/Автотесты-и-ИИ-презентация.pptx
+++ b/Автотесты-и-ИИ-презентация.pptx
@@ -13,6 +13,7 @@
     <p:sldId id="261" r:id="rId12"/>
     <p:sldId id="262" r:id="rId13"/>
     <p:sldId id="263" r:id="rId14"/>
+    <p:sldId id="267" r:id="rId18"/>
     <p:sldId id="264" r:id="rId15"/>
     <p:sldId id="265" r:id="rId16"/>
     <p:sldId id="266" r:id="rId17"/>
@@ -3365,7 +3366,7 @@
                 </a:solidFill>
                 <a:latin typeface="Consolas"/>
               </a:rPr>
-              <a:t>57</a:t>
+              <a:t>671</a:t>
             </a:r>
           </a:p>
         </p:txBody>
@@ -3400,7 +3401,7 @@
                 </a:solidFill>
                 <a:latin typeface="Calibri"/>
               </a:rPr>
-              <a:t>автоматических проверок сайта, которые можно запускать в любой момент</a:t>
+              <a:t>автоматических тест-кейсов, которые можно запускать в любой момент</a:t>
             </a:r>
           </a:p>
         </p:txBody>
@@ -3671,7 +3672,7 @@
                 </a:solidFill>
                 <a:latin typeface="Consolas"/>
               </a:rPr>
-              <a:t>01 / 11</a:t>
+              <a:t>01 / 12</a:t>
             </a:r>
           </a:p>
         </p:txBody>
@@ -4500,7 +4501,7 @@
                 </a:solidFill>
                 <a:latin typeface="Consolas"/>
               </a:rPr>
-              <a:t>10 / 11</a:t>
+              <a:t>11 / 12</a:t>
             </a:r>
           </a:p>
         </p:txBody>
@@ -4933,7 +4934,322 @@
                 </a:solidFill>
                 <a:latin typeface="Consolas"/>
               </a:rPr>
-              <a:t>11 / 11</a:t>
+              <a:t>12 / 12</a:t>
+            </a:r>
+          </a:p>
+        </p:txBody>
+      </p:sp>
+    </p:spTree>
+  </p:cSld>
+  <p:clrMapOvr>
+    <a:masterClrMapping/>
+  </p:clrMapOvr>
+</p:sld>
+</file>
+
+<file path=ppt/slides/slide12.xml><?xml version="1.0" encoding="utf-8"?>
+<p:sld xmlns:a="http://schemas.openxmlformats.org/drawingml/2006/main" xmlns:p="http://schemas.openxmlformats.org/presentationml/2006/main" xmlns:r="http://schemas.openxmlformats.org/officeDocument/2006/relationships">
+  <p:cSld>
+    <p:spTree>
+      <p:nvGrpSpPr>
+        <p:cNvPr id="1" name=""/>
+        <p:cNvGrpSpPr/>
+        <p:nvPr/>
+      </p:nvGrpSpPr>
+      <p:grpSpPr/>
+      <p:sp>
+        <p:nvSpPr>
+          <p:cNvPr id="2" name="Rectangle 1"/>
+          <p:cNvSpPr/>
+          <p:nvPr/>
+        </p:nvSpPr>
+        <p:spPr>
+          <a:xfrm>
+            <a:off x="0" y="0"/>
+            <a:ext cx="12191695" cy="6858000"/>
+          </a:xfrm>
+          <a:prstGeom prst="rect">
+            <a:avLst/>
+          </a:prstGeom>
+          <a:solidFill>
+            <a:srgbClr val="EEF2EF"/>
+          </a:solidFill>
+          <a:ln>
+            <a:noFill/>
+          </a:ln>
+          <a:effectLst/>
+        </p:spPr>
+        <p:style>
+          <a:lnRef idx="1">
+            <a:schemeClr val="accent1"/>
+          </a:lnRef>
+          <a:fillRef idx="3">
+            <a:schemeClr val="accent1"/>
+          </a:fillRef>
+          <a:effectRef idx="2">
+            <a:schemeClr val="accent1"/>
+          </a:effectRef>
+          <a:fontRef idx="minor">
+            <a:schemeClr val="lt1"/>
+          </a:fontRef>
+        </p:style>
+        <p:txBody>
+          <a:bodyPr rtlCol="0" anchor="ctr"/>
+          <a:lstStyle/>
+          <a:p>
+            <a:pPr algn="ctr"/>
+          </a:p>
+        </p:txBody>
+      </p:sp>
+      <p:sp>
+        <p:nvSpPr>
+          <p:cNvPr id="3" name="TextBox 2"/>
+          <p:cNvSpPr txBox="1"/>
+          <p:nvPr/>
+        </p:nvSpPr>
+        <p:spPr>
+          <a:xfrm>
+            <a:off x="640080" y="457200"/>
+            <a:ext cx="10911535" cy="274320"/>
+          </a:xfrm>
+          <a:prstGeom prst="rect">
+            <a:avLst/>
+          </a:prstGeom>
+          <a:noFill/>
+        </p:spPr>
+        <p:txBody>
+          <a:bodyPr wrap="square" lIns="0" rIns="0" tIns="0" bIns="0" anchor="t">
+            <a:spAutoFit/>
+          </a:bodyPr>
+          <a:lstStyle/>
+          <a:p>
+            <a:pPr algn="l"/>
+            <a:r>
+              <a:rPr sz="1150" b="1">
+                <a:solidFill>
+                  <a:srgbClr val="0E6B57"/>
+                </a:solidFill>
+                <a:latin typeface="Consolas"/>
+              </a:rPr>
+              <a:t>ИИ ЗА РАБОТОЙ — РЕАЛЬНЫЙ ПРИМЕР</a:t>
+            </a:r>
+          </a:p>
+        </p:txBody>
+      </p:sp>
+      <p:sp>
+        <p:nvSpPr>
+          <p:cNvPr id="4" name="TextBox 3"/>
+          <p:cNvSpPr txBox="1"/>
+          <p:nvPr/>
+        </p:nvSpPr>
+        <p:spPr>
+          <a:xfrm>
+            <a:off x="640080" y="801720"/>
+            <a:ext cx="10911535" cy="457200"/>
+          </a:xfrm>
+          <a:prstGeom prst="rect">
+            <a:avLst/>
+          </a:prstGeom>
+          <a:noFill/>
+        </p:spPr>
+        <p:txBody>
+          <a:bodyPr wrap="square" lIns="0" rIns="0" tIns="0" bIns="0" anchor="t">
+            <a:spAutoFit/>
+          </a:bodyPr>
+          <a:lstStyle/>
+          <a:p>
+            <a:pPr>
+              <a:lnSpc>
+                <a:spcPct val="104000"/>
+              </a:lnSpc>
+            </a:pPr>
+            <a:r>
+              <a:rPr sz="2000" b="1">
+                <a:solidFill>
+                  <a:srgbClr val="14181A"/>
+                </a:solidFill>
+                <a:latin typeface="Georgia"/>
+              </a:rPr>
+              <a:t>ИИ сам находит свою же ошибку — и тут же её исправляет</a:t>
+            </a:r>
+          </a:p>
+        </p:txBody>
+      </p:sp>
+      <p:sp>
+        <p:nvSpPr>
+          <p:cNvPr id="5" name="TextBox 4"/>
+          <p:cNvSpPr txBox="1"/>
+          <p:nvPr/>
+        </p:nvSpPr>
+        <p:spPr>
+          <a:xfrm>
+            <a:off x="640080" y="1303020"/>
+            <a:ext cx="10911535" cy="365760"/>
+          </a:xfrm>
+          <a:prstGeom prst="rect">
+            <a:avLst/>
+          </a:prstGeom>
+          <a:noFill/>
+        </p:spPr>
+        <p:txBody>
+          <a:bodyPr wrap="square" lIns="0" rIns="0" tIns="0" bIns="0" anchor="t">
+            <a:spAutoFit/>
+          </a:bodyPr>
+          <a:lstStyle/>
+          <a:p>
+            <a:pPr>
+              <a:lnSpc>
+                <a:spcPct val="115000"/>
+              </a:lnSpc>
+            </a:pPr>
+            <a:r>
+              <a:rPr sz="1350">
+                <a:solidFill>
+                  <a:srgbClr val="5B655F"/>
+                </a:solidFill>
+                <a:latin typeface="Calibri"/>
+              </a:rPr>
+              <a:t>Ниже — дословный фрагмент переписки одной сессии тестирования, без правок и без монтажа.</a:t>
+            </a:r>
+          </a:p>
+        </p:txBody>
+      </p:sp>
+      <p:sp>
+        <p:nvSpPr>
+          <p:cNvPr id="6" name="Rectangle 5"/>
+          <p:cNvSpPr/>
+          <p:nvPr/>
+        </p:nvSpPr>
+        <p:spPr>
+          <a:xfrm>
+            <a:off x="640080" y="1750060"/>
+            <a:ext cx="10911535" cy="4350000"/>
+          </a:xfrm>
+          <a:prstGeom prst="rect">
+            <a:avLst/>
+          </a:prstGeom>
+          <a:solidFill>
+            <a:srgbClr val="14181A"/>
+          </a:solidFill>
+          <a:ln w="9525">
+            <a:solidFill>
+              <a:srgbClr val="C7D0CA"/>
+            </a:solidFill>
+          </a:ln>
+          <a:effectLst/>
+        </p:spPr>
+        <p:style>
+          <a:lnRef idx="1">
+            <a:schemeClr val="accent1"/>
+          </a:lnRef>
+          <a:fillRef idx="3">
+            <a:schemeClr val="accent1"/>
+          </a:fillRef>
+          <a:effectRef idx="2">
+            <a:schemeClr val="accent1"/>
+          </a:effectRef>
+          <a:fontRef idx="minor">
+            <a:schemeClr val="lt1"/>
+          </a:fontRef>
+        </p:style>
+        <p:txBody>
+          <a:bodyPr rtlCol="0" anchor="ctr"/>
+          <a:lstStyle/>
+          <a:p>
+            <a:pPr algn="ctr"/>
+          </a:p>
+        </p:txBody>
+      </p:sp>
+      <p:pic>
+        <p:nvPicPr>
+          <p:cNvPr id="7" name="Picture 6" descr="ai-transcript-example.png"/>
+          <p:cNvPicPr>
+            <a:picLocks noChangeAspect="1"/>
+          </p:cNvPicPr>
+          <p:nvPr/>
+        </p:nvPicPr>
+        <p:blipFill>
+          <a:blip r:embed="rId2"/>
+          <a:stretch>
+            <a:fillRect/>
+          </a:stretch>
+        </p:blipFill>
+        <p:spPr>
+          <a:xfrm>
+            <a:off x="822960" y="1932940"/>
+            <a:ext cx="10545775" cy="3658476"/>
+          </a:xfrm>
+          <a:prstGeom prst="rect">
+            <a:avLst/>
+          </a:prstGeom>
+        </p:spPr>
+      </p:pic>
+      <p:sp>
+        <p:nvSpPr>
+          <p:cNvPr id="8" name="TextBox 7"/>
+          <p:cNvSpPr txBox="1"/>
+          <p:nvPr/>
+        </p:nvSpPr>
+        <p:spPr>
+          <a:xfrm>
+            <a:off x="822960" y="5728756"/>
+            <a:ext cx="10545775" cy="274320"/>
+          </a:xfrm>
+          <a:prstGeom prst="rect">
+            <a:avLst/>
+          </a:prstGeom>
+          <a:noFill/>
+        </p:spPr>
+        <p:txBody>
+          <a:bodyPr wrap="square" lIns="0" rIns="0" tIns="0" bIns="0" anchor="t">
+            <a:spAutoFit/>
+          </a:bodyPr>
+          <a:lstStyle/>
+          <a:p>
+            <a:pPr algn="l"/>
+            <a:r>
+              <a:rPr sz="950" b="1">
+                <a:solidFill>
+                  <a:srgbClr val="8FE3B8"/>
+                </a:solidFill>
+                <a:latin typeface="Consolas"/>
+              </a:rPr>
+              <a:t>РЕАЛЬНЫЙ ЛОГ · СЕССИЯ ТЕСТИРОВАНИЯ 2026-08-11 · БЕЗ ПРАВОК</a:t>
+            </a:r>
+          </a:p>
+        </p:txBody>
+      </p:sp>
+      <p:sp>
+        <p:nvSpPr>
+          <p:cNvPr id="9" name="TextBox 8"/>
+          <p:cNvSpPr txBox="1"/>
+          <p:nvPr/>
+        </p:nvSpPr>
+        <p:spPr>
+          <a:xfrm>
+            <a:off x="10728655" y="6473952"/>
+            <a:ext cx="914400" cy="274320"/>
+          </a:xfrm>
+          <a:prstGeom prst="rect">
+            <a:avLst/>
+          </a:prstGeom>
+          <a:noFill/>
+        </p:spPr>
+        <p:txBody>
+          <a:bodyPr wrap="square" lIns="0" rIns="0" tIns="0" bIns="0" anchor="t">
+            <a:spAutoFit/>
+          </a:bodyPr>
+          <a:lstStyle/>
+          <a:p>
+            <a:pPr algn="r"/>
+            <a:r>
+              <a:rPr sz="1050" b="0">
+                <a:solidFill>
+                  <a:srgbClr val="5B655F"/>
+                </a:solidFill>
+                <a:latin typeface="Consolas"/>
+              </a:rPr>
+              <a:t>09 / 12</a:t>
             </a:r>
           </a:p>
         </p:txBody>
@@ -5618,7 +5934,7 @@
                 </a:solidFill>
                 <a:latin typeface="Consolas"/>
               </a:rPr>
-              <a:t>02 / 11</a:t>
+              <a:t>02 / 12</a:t>
             </a:r>
           </a:p>
         </p:txBody>
@@ -6027,7 +6343,7 @@
                 </a:solidFill>
                 <a:latin typeface="Consolas"/>
               </a:rPr>
-              <a:t>03 / 11</a:t>
+              <a:t>03 / 12</a:t>
             </a:r>
           </a:p>
         </p:txBody>
@@ -6604,7 +6920,7 @@
                 </a:solidFill>
                 <a:latin typeface="Consolas"/>
               </a:rPr>
-              <a:t>04 / 11</a:t>
+              <a:t>04 / 12</a:t>
             </a:r>
           </a:p>
         </p:txBody>
@@ -7964,7 +8280,7 @@
                 </a:solidFill>
                 <a:latin typeface="Calibri"/>
               </a:rPr>
-              <a:t>Итого задокументировано и сверено с сайтом свыше 750 конкретных проверочных сценариев только по трём крупнейшим разделам. Работа ведётся с 26 февраля 2026 — 90 версий тестового набора за неполные шесть месяцев.</a:t>
+              <a:t>Итого задокументировано и сверено с сайтом свыше 750 конкретных проверочных сценариев только по трём крупнейшим разделам, а в самих автотестах — 671 тест-кейс в 57 файлах. Работа ведётся с 26 февраля 2026 — 90 версий тестового набора за неполные шесть месяцев.</a:t>
             </a:r>
           </a:p>
         </p:txBody>
@@ -7999,7 +8315,7 @@
                 </a:solidFill>
                 <a:latin typeface="Consolas"/>
               </a:rPr>
-              <a:t>05 / 11</a:t>
+              <a:t>05 / 12</a:t>
             </a:r>
           </a:p>
         </p:txBody>
@@ -9270,7 +9586,7 @@
                 </a:solidFill>
                 <a:latin typeface="Consolas"/>
               </a:rPr>
-              <a:t>06 / 11</a:t>
+              <a:t>06 / 12</a:t>
             </a:r>
           </a:p>
         </p:txBody>
@@ -10487,7 +10803,7 @@
                 </a:solidFill>
                 <a:latin typeface="Consolas"/>
               </a:rPr>
-              <a:t>07 / 11</a:t>
+              <a:t>07 / 12</a:t>
             </a:r>
           </a:p>
         </p:txBody>
@@ -11175,7 +11491,7 @@
                 </a:solidFill>
                 <a:latin typeface="Consolas"/>
               </a:rPr>
-              <a:t>08 / 11</a:t>
+              <a:t>08 / 12</a:t>
             </a:r>
           </a:p>
         </p:txBody>
@@ -12493,7 +12809,7 @@
                 </a:solidFill>
                 <a:latin typeface="Consolas"/>
               </a:rPr>
-              <a:t>09 / 11</a:t>
+              <a:t>10 / 12</a:t>
             </a:r>
           </a:p>
         </p:txBody>
